--- a/Long Term Growth Trends in the S&P500 Index Presentation.pptx
+++ b/Long Term Growth Trends in the S&P500 Index Presentation.pptx
@@ -17610,7 +17610,7 @@
         <p:spPr>
           <a:xfrm>
             <a:off x="713225" y="3541600"/>
-            <a:ext cx="4160700" cy="1512060"/>
+            <a:ext cx="4694938" cy="1512060"/>
           </a:xfrm>
           <a:prstGeom prst="rect">
             <a:avLst/>
@@ -17667,18 +17667,32 @@
             </a:r>
           </a:p>
           <a:p>
-            <a:pPr marL="0" lvl="0" indent="0" algn="l" rtl="0">
-              <a:spcBef>
-                <a:spcPts val="0"/>
-              </a:spcBef>
-              <a:spcAft>
-                <a:spcPts val="0"/>
-              </a:spcAft>
-              <a:buNone/>
-            </a:pPr>
+            <a:pPr marL="0" lvl="0" indent="0"/>
             <a:r>
               <a:rPr lang="en-US" dirty="0"/>
               <a:t>GitHub Repository: </a:t>
+            </a:r>
+            <a:r>
+              <a:rPr lang="en-US" dirty="0">
+                <a:hlinkClick r:id="rId3"/>
+              </a:rPr>
+              <a:t>https://</a:t>
+            </a:r>
+            <a:r>
+              <a:rPr lang="en-US" dirty="0" err="1">
+                <a:hlinkClick r:id="rId3"/>
+              </a:rPr>
+              <a:t>github.com</a:t>
+            </a:r>
+            <a:r>
+              <a:rPr lang="en-US" dirty="0">
+                <a:hlinkClick r:id="rId3"/>
+              </a:rPr>
+              <a:t>/tahity18/BSAN-360-Project</a:t>
+            </a:r>
+            <a:r>
+              <a:rPr lang="en-US" dirty="0"/>
+              <a:t> </a:t>
             </a:r>
             <a:endParaRPr dirty="0"/>
           </a:p>
